--- a/APRESENTAÇÃO DATATHON.pptx
+++ b/APRESENTAÇÃO DATATHON.pptx
@@ -159,7 +159,7 @@
   <pc:docChgLst>
     <pc:chgData name="Vanderlei Aparecido de Oliveira Soares" userId="176561fbfdb93ee7" providerId="LiveId" clId="{2F1C560C-E92D-4863-805D-FD3AA6D066CD}"/>
     <pc:docChg chg="custSel delSld modSld sldOrd">
-      <pc:chgData name="Vanderlei Aparecido de Oliveira Soares" userId="176561fbfdb93ee7" providerId="LiveId" clId="{2F1C560C-E92D-4863-805D-FD3AA6D066CD}" dt="2026-03-31T20:55:28.779" v="1482" actId="5793"/>
+      <pc:chgData name="Vanderlei Aparecido de Oliveira Soares" userId="176561fbfdb93ee7" providerId="LiveId" clId="{2F1C560C-E92D-4863-805D-FD3AA6D066CD}" dt="2026-03-31T21:13:21.504" v="2497" actId="20577"/>
       <pc:docMkLst>
         <pc:docMk/>
       </pc:docMkLst>
@@ -376,8 +376,8 @@
           </ac:picMkLst>
         </pc:picChg>
       </pc:sldChg>
-      <pc:sldChg chg="delSp modSp mod ord modNotes">
-        <pc:chgData name="Vanderlei Aparecido de Oliveira Soares" userId="176561fbfdb93ee7" providerId="LiveId" clId="{2F1C560C-E92D-4863-805D-FD3AA6D066CD}" dt="2026-03-31T20:55:28.779" v="1482" actId="5793"/>
+      <pc:sldChg chg="delSp modSp mod ord modNotes modNotesTx">
+        <pc:chgData name="Vanderlei Aparecido de Oliveira Soares" userId="176561fbfdb93ee7" providerId="LiveId" clId="{2F1C560C-E92D-4863-805D-FD3AA6D066CD}" dt="2026-03-31T21:09:24.194" v="2175" actId="6549"/>
         <pc:sldMkLst>
           <pc:docMk/>
           <pc:sldMk cId="0" sldId="259"/>
@@ -407,7 +407,7 @@
           </ac:spMkLst>
         </pc:spChg>
         <pc:spChg chg="mod">
-          <ac:chgData name="Vanderlei Aparecido de Oliveira Soares" userId="176561fbfdb93ee7" providerId="LiveId" clId="{2F1C560C-E92D-4863-805D-FD3AA6D066CD}" dt="2026-03-31T20:55:28.779" v="1482" actId="5793"/>
+          <ac:chgData name="Vanderlei Aparecido de Oliveira Soares" userId="176561fbfdb93ee7" providerId="LiveId" clId="{2F1C560C-E92D-4863-805D-FD3AA6D066CD}" dt="2026-03-31T21:02:18.711" v="1494" actId="20577"/>
           <ac:spMkLst>
             <pc:docMk/>
             <pc:sldMk cId="0" sldId="259"/>
@@ -415,8 +415,15 @@
           </ac:spMkLst>
         </pc:spChg>
       </pc:sldChg>
-      <pc:sldChg chg="addSp delSp modSp mod ord">
-        <pc:chgData name="Vanderlei Aparecido de Oliveira Soares" userId="176561fbfdb93ee7" providerId="LiveId" clId="{2F1C560C-E92D-4863-805D-FD3AA6D066CD}" dt="2026-03-31T20:45:03.265" v="1197" actId="14100"/>
+      <pc:sldChg chg="modNotesTx">
+        <pc:chgData name="Vanderlei Aparecido de Oliveira Soares" userId="176561fbfdb93ee7" providerId="LiveId" clId="{2F1C560C-E92D-4863-805D-FD3AA6D066CD}" dt="2026-03-31T21:04:07.094" v="1566" actId="20577"/>
+        <pc:sldMkLst>
+          <pc:docMk/>
+          <pc:sldMk cId="0" sldId="260"/>
+        </pc:sldMkLst>
+      </pc:sldChg>
+      <pc:sldChg chg="addSp delSp modSp mod ord modNotesTx">
+        <pc:chgData name="Vanderlei Aparecido de Oliveira Soares" userId="176561fbfdb93ee7" providerId="LiveId" clId="{2F1C560C-E92D-4863-805D-FD3AA6D066CD}" dt="2026-03-31T21:13:21.504" v="2497" actId="20577"/>
         <pc:sldMkLst>
           <pc:docMk/>
           <pc:sldMk cId="0" sldId="261"/>
@@ -606,8 +613,8 @@
           </ac:picMkLst>
         </pc:picChg>
       </pc:sldChg>
-      <pc:sldChg chg="ord">
-        <pc:chgData name="Vanderlei Aparecido de Oliveira Soares" userId="176561fbfdb93ee7" providerId="LiveId" clId="{2F1C560C-E92D-4863-805D-FD3AA6D066CD}" dt="2026-03-31T20:11:43.117" v="1"/>
+      <pc:sldChg chg="ord modNotesTx">
+        <pc:chgData name="Vanderlei Aparecido de Oliveira Soares" userId="176561fbfdb93ee7" providerId="LiveId" clId="{2F1C560C-E92D-4863-805D-FD3AA6D066CD}" dt="2026-03-31T21:05:27.444" v="1690" actId="20577"/>
         <pc:sldMkLst>
           <pc:docMk/>
           <pc:sldMk cId="0" sldId="262"/>
@@ -620,8 +627,8 @@
           <pc:sldMk cId="0" sldId="264"/>
         </pc:sldMkLst>
       </pc:sldChg>
-      <pc:sldChg chg="addSp delSp modSp mod ord modNotes">
-        <pc:chgData name="Vanderlei Aparecido de Oliveira Soares" userId="176561fbfdb93ee7" providerId="LiveId" clId="{2F1C560C-E92D-4863-805D-FD3AA6D066CD}" dt="2026-03-31T20:19:37.712" v="315" actId="255"/>
+      <pc:sldChg chg="addSp delSp modSp mod ord modNotes modNotesTx">
+        <pc:chgData name="Vanderlei Aparecido de Oliveira Soares" userId="176561fbfdb93ee7" providerId="LiveId" clId="{2F1C560C-E92D-4863-805D-FD3AA6D066CD}" dt="2026-03-31T21:09:11.535" v="2174" actId="20577"/>
         <pc:sldMkLst>
           <pc:docMk/>
           <pc:sldMk cId="0" sldId="265"/>
@@ -1195,32 +1202,18 @@
           <a:bodyPr/>
           <a:lstStyle/>
           <a:p>
-            <a:pPr marL="0" marR="0" lvl="0" indent="0" algn="l" defTabSz="914400" rtl="0" eaLnBrk="1" fontAlgn="auto" latinLnBrk="0" hangingPunct="1">
-              <a:lnSpc>
-                <a:spcPct val="100000"/>
-              </a:lnSpc>
-              <a:spcBef>
-                <a:spcPts val="0"/>
-              </a:spcBef>
-              <a:spcAft>
-                <a:spcPts val="0"/>
-              </a:spcAft>
-              <a:buClrTx/>
-              <a:buSzTx/>
-              <a:buFontTx/>
-              <a:buNone/>
-              <a:tabLst/>
-              <a:defRPr/>
-            </a:pPr>
             <a:r>
-              <a:rPr lang="pt-BR" dirty="0">
-                <a:effectLst/>
-              </a:rPr>
-              <a:t>A avaliação de competências é a principal ferramenta para acompanhar esse desenvolvimento. Ela permite identificar pontos fortes, oportunidades de melhoria e alinhar o crescimento individual às estratégias organizacionais.</a:t>
+              <a:rPr lang="pt-BR" dirty="0"/>
+              <a:t>Olá sou Vanderlei, </a:t>
             </a:r>
-          </a:p>
-          <a:p>
-            <a:endParaRPr lang="pt-BR" dirty="0"/>
+            <a:r>
+              <a:rPr lang="pt-BR" dirty="0" err="1"/>
+              <a:t>to</a:t>
+            </a:r>
+            <a:r>
+              <a:rPr lang="pt-BR" dirty="0"/>
+              <a:t> aqui pra apresentar o projeto DATATHON da FASE 5 </a:t>
+            </a:r>
           </a:p>
         </p:txBody>
       </p:sp>
@@ -1328,27 +1321,7 @@
           <a:p>
             <a:r>
               <a:rPr lang="pt-BR" dirty="0"/>
-              <a:t>Essas mudanças estão em todos os aspectos, nossos concorrentes deixaram de ser algumas instituições financeiras e passaram a ser centenas de fintechs;</a:t>
-            </a:r>
-          </a:p>
-          <a:p>
-            <a:r>
-              <a:rPr lang="pt-BR" dirty="0"/>
-              <a:t>Nossos clientes deixaram de frequentar as agências e agora realizam suas transações de forma majoritária pelo app;</a:t>
-            </a:r>
-          </a:p>
-          <a:p>
-            <a:r>
-              <a:rPr lang="pt-BR" dirty="0"/>
-              <a:t>Sem contar em novos equipamentos e na inteligência artificial que </a:t>
-            </a:r>
-            <a:r>
-              <a:rPr lang="pt-BR" dirty="0" err="1"/>
-              <a:t>hj</a:t>
-            </a:r>
-            <a:r>
-              <a:rPr lang="pt-BR" dirty="0"/>
-              <a:t> esta presente em quase tudo no nosso dia a dia;</a:t>
+              <a:t>O projeto foi desenvolvido para classificar as reclamações financeiras e analisar as principais dores dos clientes</a:t>
             </a:r>
           </a:p>
         </p:txBody>
@@ -1476,7 +1449,7 @@
               <a:rPr lang="pt-BR" dirty="0">
                 <a:effectLst/>
               </a:rPr>
-              <a:t>A liderança tem papel fundamental nesse processo: precisa se desenvolver continuamente e, ao mesmo tempo, criar um ambiente que estimule o crescimento das equipes, valorizando aprendizado, diálogo e desenvolvimento.</a:t>
+              <a:t>Através dele foi gerada uma nuvem de palavras, gerada através da separação das palavras mais utilizadas nas interações consideradas negativas. Isso ajuda a identificar quais são os maiores problemas enfrentados pelos usuários.</a:t>
             </a:r>
           </a:p>
           <a:p>
@@ -1586,31 +1559,6 @@
           <a:bodyPr/>
           <a:lstStyle/>
           <a:p>
-            <a:pPr marL="0" marR="0" lvl="0" indent="0" algn="l" defTabSz="914400" rtl="0" eaLnBrk="1" fontAlgn="auto" latinLnBrk="0" hangingPunct="1">
-              <a:lnSpc>
-                <a:spcPct val="100000"/>
-              </a:lnSpc>
-              <a:spcBef>
-                <a:spcPts val="0"/>
-              </a:spcBef>
-              <a:spcAft>
-                <a:spcPts val="0"/>
-              </a:spcAft>
-              <a:buClrTx/>
-              <a:buSzTx/>
-              <a:buFontTx/>
-              <a:buNone/>
-              <a:tabLst/>
-              <a:defRPr/>
-            </a:pPr>
-            <a:r>
-              <a:rPr lang="pt-BR" dirty="0">
-                <a:effectLst/>
-              </a:rPr>
-              <a:t>Quando a avaliação é individualizada, ela se torna mais justa e eficaz, respeitando as diferenças entre as pessoas e permitindo um diagnóstico mais preciso do potencial de cada colaborador.</a:t>
-            </a:r>
-          </a:p>
-          <a:p>
             <a:endParaRPr lang="pt-BR" dirty="0"/>
           </a:p>
         </p:txBody>
@@ -1719,8 +1667,13 @@
           <a:p>
             <a:r>
               <a:rPr lang="pt-BR" dirty="0"/>
-              <a:t>O BB tem acompanhado esse cenário com investimentos em tecnologia, novos sistemas e modelos de atendimento figital. No entanto, esses avanços só geram resultados quando o capital humano consegue acompanhar e utilizar essas ferramentas de forma estratégica.</a:t>
+              <a:t>A frequência de termos por produto, permite identificar dentro de cada categoria quais são os maiores problemas enfrentados. Isto ajuda na implementação de melhorias voltadas a solucionar as demandas que causam maiores impactos negativos </a:t>
             </a:r>
+            <a:r>
+              <a:rPr lang="pt-BR"/>
+              <a:t>nos usuários.</a:t>
+            </a:r>
+            <a:endParaRPr lang="pt-BR" dirty="0"/>
           </a:p>
         </p:txBody>
       </p:sp>
@@ -31635,7 +31588,7 @@
                 </a:solidFill>
                 <a:latin typeface="BancoDoBrasil Textos" panose="00000500000000000000" charset="0"/>
               </a:rPr>
-              <a:t>Atraso</a:t>
+              <a:t>Fraude</a:t>
             </a:r>
           </a:p>
           <a:p>
@@ -31674,18 +31627,7 @@
                 <a:uFillTx/>
                 <a:latin typeface="BancoDoBrasil Textos" panose="00000500000000000000" charset="0"/>
               </a:rPr>
-              <a:t>Falha </a:t>
-            </a:r>
-            <a:r>
-              <a:rPr lang="pt-BR" sz="2800" b="0" u="none" strike="noStrike" spc="9">
-                <a:solidFill>
-                  <a:srgbClr val="FFFFFF"/>
-                </a:solidFill>
-                <a:effectLst/>
-                <a:uFillTx/>
-                <a:latin typeface="BancoDoBrasil Textos" panose="00000500000000000000" charset="0"/>
-              </a:rPr>
-              <a:t>no atendimento</a:t>
+              <a:t>Falha no atendimento</a:t>
             </a:r>
           </a:p>
           <a:p>

--- a/APRESENTAÇÃO DATATHON.pptx
+++ b/APRESENTAÇÃO DATATHON.pptx
@@ -159,7 +159,7 @@
   <pc:docChgLst>
     <pc:chgData name="Vanderlei Aparecido de Oliveira Soares" userId="176561fbfdb93ee7" providerId="LiveId" clId="{2F1C560C-E92D-4863-805D-FD3AA6D066CD}"/>
     <pc:docChg chg="custSel delSld modSld sldOrd">
-      <pc:chgData name="Vanderlei Aparecido de Oliveira Soares" userId="176561fbfdb93ee7" providerId="LiveId" clId="{2F1C560C-E92D-4863-805D-FD3AA6D066CD}" dt="2026-03-31T21:13:21.504" v="2497" actId="20577"/>
+      <pc:chgData name="Vanderlei Aparecido de Oliveira Soares" userId="176561fbfdb93ee7" providerId="LiveId" clId="{2F1C560C-E92D-4863-805D-FD3AA6D066CD}" dt="2026-03-31T21:43:15.209" v="2498" actId="6549"/>
       <pc:docMkLst>
         <pc:docMk/>
       </pc:docMkLst>
@@ -177,8 +177,8 @@
           <pc:sldMk cId="0" sldId="257"/>
         </pc:sldMkLst>
       </pc:sldChg>
-      <pc:sldChg chg="addSp delSp modSp mod ord modNotes">
-        <pc:chgData name="Vanderlei Aparecido de Oliveira Soares" userId="176561fbfdb93ee7" providerId="LiveId" clId="{2F1C560C-E92D-4863-805D-FD3AA6D066CD}" dt="2026-03-31T20:50:42.761" v="1380" actId="1036"/>
+      <pc:sldChg chg="addSp delSp modSp mod ord modNotes modNotesTx">
+        <pc:chgData name="Vanderlei Aparecido de Oliveira Soares" userId="176561fbfdb93ee7" providerId="LiveId" clId="{2F1C560C-E92D-4863-805D-FD3AA6D066CD}" dt="2026-03-31T21:43:15.209" v="2498" actId="6549"/>
         <pc:sldMkLst>
           <pc:docMk/>
           <pc:sldMk cId="0" sldId="258"/>
@@ -1778,31 +1778,6 @@
         <p:txBody>
           <a:bodyPr/>
           <a:lstStyle/>
-          <a:p>
-            <a:pPr marL="0" marR="0" lvl="0" indent="0" algn="l" defTabSz="914400" rtl="0" eaLnBrk="1" fontAlgn="auto" latinLnBrk="0" hangingPunct="1">
-              <a:lnSpc>
-                <a:spcPct val="100000"/>
-              </a:lnSpc>
-              <a:spcBef>
-                <a:spcPts val="0"/>
-              </a:spcBef>
-              <a:spcAft>
-                <a:spcPts val="0"/>
-              </a:spcAft>
-              <a:buClrTx/>
-              <a:buSzTx/>
-              <a:buFontTx/>
-              <a:buNone/>
-              <a:tabLst/>
-              <a:defRPr/>
-            </a:pPr>
-            <a:r>
-              <a:rPr lang="pt-BR" dirty="0">
-                <a:effectLst/>
-              </a:rPr>
-              <a:t>O Banco do Brasil se destaca por investir fortemente em educação corporativa, com uma das maiores universidades corporativas do mundo, além de bolsas de estudo e programas de capacitação. Isso demonstra uma visão de longo prazo voltada ao desenvolvimento contínuo.</a:t>
-            </a:r>
-          </a:p>
           <a:p>
             <a:endParaRPr lang="pt-BR" dirty="0"/>
           </a:p>
